--- a/iug_praesentation.pptx
+++ b/iug_praesentation.pptx
@@ -399,7 +399,7 @@
           <a:p>
             <a:fld id="{38DD0FEA-61EE-4ED6-B3B5-74C8AAD049F3}" type="datetimeFigureOut">
               <a:rPr lang="de-DE" smtClean="0"/>
-              <a:t>07.07.2026</a:t>
+              <a:t>09.07.2026</a:t>
             </a:fld>
             <a:endParaRPr lang="de-DE"/>
           </a:p>
@@ -599,7 +599,7 @@
           <a:p>
             <a:fld id="{38DD0FEA-61EE-4ED6-B3B5-74C8AAD049F3}" type="datetimeFigureOut">
               <a:rPr lang="de-DE" smtClean="0"/>
-              <a:t>07.07.2026</a:t>
+              <a:t>09.07.2026</a:t>
             </a:fld>
             <a:endParaRPr lang="de-DE"/>
           </a:p>
@@ -809,7 +809,7 @@
           <a:p>
             <a:fld id="{38DD0FEA-61EE-4ED6-B3B5-74C8AAD049F3}" type="datetimeFigureOut">
               <a:rPr lang="de-DE" smtClean="0"/>
-              <a:t>07.07.2026</a:t>
+              <a:t>09.07.2026</a:t>
             </a:fld>
             <a:endParaRPr lang="de-DE"/>
           </a:p>
@@ -1009,7 +1009,7 @@
           <a:p>
             <a:fld id="{38DD0FEA-61EE-4ED6-B3B5-74C8AAD049F3}" type="datetimeFigureOut">
               <a:rPr lang="de-DE" smtClean="0"/>
-              <a:t>07.07.2026</a:t>
+              <a:t>09.07.2026</a:t>
             </a:fld>
             <a:endParaRPr lang="de-DE"/>
           </a:p>
@@ -1285,7 +1285,7 @@
           <a:p>
             <a:fld id="{38DD0FEA-61EE-4ED6-B3B5-74C8AAD049F3}" type="datetimeFigureOut">
               <a:rPr lang="de-DE" smtClean="0"/>
-              <a:t>07.07.2026</a:t>
+              <a:t>09.07.2026</a:t>
             </a:fld>
             <a:endParaRPr lang="de-DE"/>
           </a:p>
@@ -1553,7 +1553,7 @@
           <a:p>
             <a:fld id="{38DD0FEA-61EE-4ED6-B3B5-74C8AAD049F3}" type="datetimeFigureOut">
               <a:rPr lang="de-DE" smtClean="0"/>
-              <a:t>07.07.2026</a:t>
+              <a:t>09.07.2026</a:t>
             </a:fld>
             <a:endParaRPr lang="de-DE"/>
           </a:p>
@@ -1968,7 +1968,7 @@
           <a:p>
             <a:fld id="{38DD0FEA-61EE-4ED6-B3B5-74C8AAD049F3}" type="datetimeFigureOut">
               <a:rPr lang="de-DE" smtClean="0"/>
-              <a:t>07.07.2026</a:t>
+              <a:t>09.07.2026</a:t>
             </a:fld>
             <a:endParaRPr lang="de-DE"/>
           </a:p>
@@ -2110,7 +2110,7 @@
           <a:p>
             <a:fld id="{38DD0FEA-61EE-4ED6-B3B5-74C8AAD049F3}" type="datetimeFigureOut">
               <a:rPr lang="de-DE" smtClean="0"/>
-              <a:t>07.07.2026</a:t>
+              <a:t>09.07.2026</a:t>
             </a:fld>
             <a:endParaRPr lang="de-DE"/>
           </a:p>
@@ -2223,7 +2223,7 @@
           <a:p>
             <a:fld id="{38DD0FEA-61EE-4ED6-B3B5-74C8AAD049F3}" type="datetimeFigureOut">
               <a:rPr lang="de-DE" smtClean="0"/>
-              <a:t>07.07.2026</a:t>
+              <a:t>09.07.2026</a:t>
             </a:fld>
             <a:endParaRPr lang="de-DE"/>
           </a:p>
@@ -2536,7 +2536,7 @@
           <a:p>
             <a:fld id="{38DD0FEA-61EE-4ED6-B3B5-74C8AAD049F3}" type="datetimeFigureOut">
               <a:rPr lang="de-DE" smtClean="0"/>
-              <a:t>07.07.2026</a:t>
+              <a:t>09.07.2026</a:t>
             </a:fld>
             <a:endParaRPr lang="de-DE"/>
           </a:p>
@@ -2825,7 +2825,7 @@
           <a:p>
             <a:fld id="{38DD0FEA-61EE-4ED6-B3B5-74C8AAD049F3}" type="datetimeFigureOut">
               <a:rPr lang="de-DE" smtClean="0"/>
-              <a:t>07.07.2026</a:t>
+              <a:t>09.07.2026</a:t>
             </a:fld>
             <a:endParaRPr lang="de-DE"/>
           </a:p>
@@ -3071,7 +3071,7 @@
           <a:p>
             <a:fld id="{38DD0FEA-61EE-4ED6-B3B5-74C8AAD049F3}" type="datetimeFigureOut">
               <a:rPr lang="de-DE" smtClean="0"/>
-              <a:t>07.07.2026</a:t>
+              <a:t>09.07.2026</a:t>
             </a:fld>
             <a:endParaRPr lang="de-DE"/>
           </a:p>
@@ -4496,13 +4496,13 @@
   <p:clrMapOvr>
     <a:masterClrMapping/>
   </p:clrMapOvr>
-  <mc:AlternateContent xmlns:mc="http://schemas.openxmlformats.org/markup-compatibility/2006">
-    <mc:Choice xmlns:p14="http://schemas.microsoft.com/office/powerpoint/2010/main" Requires="p14">
+  <mc:AlternateContent xmlns:mc="http://schemas.openxmlformats.org/markup-compatibility/2006" xmlns:p14="http://schemas.microsoft.com/office/powerpoint/2010/main">
+    <mc:Choice Requires="p14">
       <p:transition spd="slow" p14:dur="2000">
         <p14:vortex dir="r"/>
       </p:transition>
     </mc:Choice>
-    <mc:Fallback>
+    <mc:Fallback xmlns="">
       <p:transition spd="slow">
         <p:fade/>
       </p:transition>

--- a/iug_praesentation.pptx
+++ b/iug_praesentation.pptx
@@ -7,8 +7,8 @@
   <p:sldIdLst>
     <p:sldId id="256" r:id="rId2"/>
     <p:sldId id="262" r:id="rId3"/>
-    <p:sldId id="260" r:id="rId4"/>
-    <p:sldId id="259" r:id="rId5"/>
+    <p:sldId id="259" r:id="rId4"/>
+    <p:sldId id="260" r:id="rId5"/>
     <p:sldId id="264" r:id="rId6"/>
     <p:sldId id="257" r:id="rId7"/>
     <p:sldId id="265" r:id="rId8"/>
@@ -3563,7 +3563,7 @@
                 </a:solidFill>
                 <a:latin typeface="Montserrat" panose="00000500000000000000" pitchFamily="2" charset="0"/>
               </a:rPr>
-              <a:t>in Bezug auf soziale Medien</a:t>
+              <a:t>Bezug: Soziale Medien</a:t>
             </a:r>
           </a:p>
         </p:txBody>
@@ -3744,7 +3744,7 @@
         <p:cNvPr id="1" name="">
           <a:extLst>
             <a:ext uri="{FF2B5EF4-FFF2-40B4-BE49-F238E27FC236}">
-              <a16:creationId xmlns:a16="http://schemas.microsoft.com/office/drawing/2014/main" id="{B911AD6B-9AFE-8F5B-DDDB-482C10816C4B}"/>
+              <a16:creationId xmlns:a16="http://schemas.microsoft.com/office/drawing/2014/main" id="{137BDA85-3CD5-A7BF-4DD6-6D42F33839B5}"/>
             </a:ext>
           </a:extLst>
         </p:cNvPr>
@@ -3764,7 +3764,7 @@
           <p:cNvPr id="2" name="Title 1">
             <a:extLst>
               <a:ext uri="{FF2B5EF4-FFF2-40B4-BE49-F238E27FC236}">
-                <a16:creationId xmlns:a16="http://schemas.microsoft.com/office/drawing/2014/main" id="{EF426BAF-1FF0-0C26-8A19-FDB4BEB85B6E}"/>
+                <a16:creationId xmlns:a16="http://schemas.microsoft.com/office/drawing/2014/main" id="{64C10970-A460-C079-0E7C-F04F857B12E4}"/>
               </a:ext>
             </a:extLst>
           </p:cNvPr>
@@ -3787,7 +3787,7 @@
                 </a:solidFill>
                 <a:latin typeface="Montserrat" panose="00000500000000000000" pitchFamily="2" charset="0"/>
               </a:rPr>
-              <a:t>Fragestellung</a:t>
+              <a:t>Grundidee</a:t>
             </a:r>
           </a:p>
         </p:txBody>
@@ -3797,7 +3797,7 @@
           <p:cNvPr id="3" name="Content Placeholder 2">
             <a:extLst>
               <a:ext uri="{FF2B5EF4-FFF2-40B4-BE49-F238E27FC236}">
-                <a16:creationId xmlns:a16="http://schemas.microsoft.com/office/drawing/2014/main" id="{2495A734-4D25-D7C7-0CF3-45FA530B7EE1}"/>
+                <a16:creationId xmlns:a16="http://schemas.microsoft.com/office/drawing/2014/main" id="{B14BC89D-2A8C-CD35-6189-0EEF70D74D21}"/>
               </a:ext>
             </a:extLst>
           </p:cNvPr>
@@ -3808,29 +3808,108 @@
             <p:ph idx="1"/>
           </p:nvPr>
         </p:nvSpPr>
-        <p:spPr>
-          <a:xfrm>
-            <a:off x="838200" y="2796406"/>
-            <a:ext cx="10515600" cy="1828786"/>
-          </a:xfrm>
-        </p:spPr>
+        <p:spPr/>
         <p:txBody>
           <a:bodyPr>
-            <a:noAutofit/>
+            <a:normAutofit/>
           </a:bodyPr>
           <a:lstStyle/>
           <a:p>
-            <a:pPr marL="0" indent="0" algn="ctr">
-              <a:buNone/>
+            <a:pPr>
+              <a:lnSpc>
+                <a:spcPct val="150000"/>
+              </a:lnSpc>
             </a:pPr>
             <a:r>
-              <a:rPr lang="de-DE" sz="3200" dirty="0">
+              <a:rPr lang="de-DE" sz="2400" dirty="0">
                 <a:solidFill>
                   <a:schemeClr val="bg1"/>
                 </a:solidFill>
                 <a:latin typeface="Montserrat" panose="00000500000000000000" pitchFamily="2" charset="0"/>
               </a:rPr>
-              <a:t>Unter welchen Bedingungen kann Content-Moderation die Verbreitung von Desinformationen in sozialen Medien wirksam begrenzen? </a:t>
+              <a:t>soziales Netzwerk besteht aus Knoten (= Accounts)</a:t>
+            </a:r>
+          </a:p>
+          <a:p>
+            <a:pPr>
+              <a:lnSpc>
+                <a:spcPct val="150000"/>
+              </a:lnSpc>
+            </a:pPr>
+            <a:r>
+              <a:rPr lang="de-DE" sz="2400" dirty="0">
+                <a:solidFill>
+                  <a:schemeClr val="bg1"/>
+                </a:solidFill>
+                <a:latin typeface="Montserrat" panose="00000500000000000000" pitchFamily="2" charset="0"/>
+              </a:rPr>
+              <a:t>Zwei Typen von Accounts: User und InfluencerInnen</a:t>
+            </a:r>
+          </a:p>
+          <a:p>
+            <a:pPr>
+              <a:lnSpc>
+                <a:spcPct val="150000"/>
+              </a:lnSpc>
+            </a:pPr>
+            <a:r>
+              <a:rPr lang="de-DE" sz="2400" dirty="0">
+                <a:solidFill>
+                  <a:schemeClr val="bg1"/>
+                </a:solidFill>
+                <a:latin typeface="Montserrat" panose="00000500000000000000" pitchFamily="2" charset="0"/>
+              </a:rPr>
+              <a:t>User: Knoten mit wenigen Verbindungen zu anderen Knoten</a:t>
+            </a:r>
+          </a:p>
+          <a:p>
+            <a:pPr>
+              <a:lnSpc>
+                <a:spcPct val="150000"/>
+              </a:lnSpc>
+            </a:pPr>
+            <a:r>
+              <a:rPr lang="de-DE" sz="2400" dirty="0">
+                <a:solidFill>
+                  <a:schemeClr val="bg1"/>
+                </a:solidFill>
+                <a:latin typeface="Montserrat" panose="00000500000000000000" pitchFamily="2" charset="0"/>
+              </a:rPr>
+              <a:t>InfluencerInnen: Knoten mit vielen Verbindungen</a:t>
+            </a:r>
+          </a:p>
+          <a:p>
+            <a:pPr>
+              <a:lnSpc>
+                <a:spcPct val="150000"/>
+              </a:lnSpc>
+            </a:pPr>
+            <a:r>
+              <a:rPr lang="de-DE" sz="2400" dirty="0">
+                <a:solidFill>
+                  <a:schemeClr val="bg1"/>
+                </a:solidFill>
+                <a:latin typeface="Montserrat" panose="00000500000000000000" pitchFamily="2" charset="0"/>
+              </a:rPr>
+              <a:t>Deutlich mehr User als InfluencerInnen</a:t>
+            </a:r>
+          </a:p>
+          <a:p>
+            <a:pPr lvl="1">
+              <a:lnSpc>
+                <a:spcPct val="150000"/>
+              </a:lnSpc>
+              <a:buFont typeface="Courier New" panose="02070309020205020404" pitchFamily="49" charset="0"/>
+              <a:buChar char="o"/>
+            </a:pPr>
+            <a:r>
+              <a:rPr lang="de-DE" dirty="0">
+                <a:solidFill>
+                  <a:schemeClr val="bg1"/>
+                </a:solidFill>
+                <a:latin typeface="Montserrat" panose="00000500000000000000" pitchFamily="2" charset="0"/>
+              </a:rPr>
+              <a:t> vereinfachte Darstellung typischer Social-Media-Strukturen</a:t>
             </a:r>
           </a:p>
         </p:txBody>
@@ -3838,7 +3917,7 @@
     </p:spTree>
     <p:extLst>
       <p:ext uri="{BB962C8B-B14F-4D97-AF65-F5344CB8AC3E}">
-        <p14:creationId xmlns:p14="http://schemas.microsoft.com/office/powerpoint/2010/main" val="4168407949"/>
+        <p14:creationId xmlns:p14="http://schemas.microsoft.com/office/powerpoint/2010/main" val="740013017"/>
       </p:ext>
     </p:extLst>
   </p:cSld>
@@ -3859,7 +3938,7 @@
         <p:cNvPr id="1" name="">
           <a:extLst>
             <a:ext uri="{FF2B5EF4-FFF2-40B4-BE49-F238E27FC236}">
-              <a16:creationId xmlns:a16="http://schemas.microsoft.com/office/drawing/2014/main" id="{137BDA85-3CD5-A7BF-4DD6-6D42F33839B5}"/>
+              <a16:creationId xmlns:a16="http://schemas.microsoft.com/office/drawing/2014/main" id="{B911AD6B-9AFE-8F5B-DDDB-482C10816C4B}"/>
             </a:ext>
           </a:extLst>
         </p:cNvPr>
@@ -3879,7 +3958,7 @@
           <p:cNvPr id="2" name="Title 1">
             <a:extLst>
               <a:ext uri="{FF2B5EF4-FFF2-40B4-BE49-F238E27FC236}">
-                <a16:creationId xmlns:a16="http://schemas.microsoft.com/office/drawing/2014/main" id="{64C10970-A460-C079-0E7C-F04F857B12E4}"/>
+                <a16:creationId xmlns:a16="http://schemas.microsoft.com/office/drawing/2014/main" id="{EF426BAF-1FF0-0C26-8A19-FDB4BEB85B6E}"/>
               </a:ext>
             </a:extLst>
           </p:cNvPr>
@@ -3902,7 +3981,7 @@
                 </a:solidFill>
                 <a:latin typeface="Montserrat" panose="00000500000000000000" pitchFamily="2" charset="0"/>
               </a:rPr>
-              <a:t>Grundidee</a:t>
+              <a:t>Fragestellung</a:t>
             </a:r>
           </a:p>
         </p:txBody>
@@ -3912,7 +3991,7 @@
           <p:cNvPr id="3" name="Content Placeholder 2">
             <a:extLst>
               <a:ext uri="{FF2B5EF4-FFF2-40B4-BE49-F238E27FC236}">
-                <a16:creationId xmlns:a16="http://schemas.microsoft.com/office/drawing/2014/main" id="{B14BC89D-2A8C-CD35-6189-0EEF70D74D21}"/>
+                <a16:creationId xmlns:a16="http://schemas.microsoft.com/office/drawing/2014/main" id="{2495A734-4D25-D7C7-0CF3-45FA530B7EE1}"/>
               </a:ext>
             </a:extLst>
           </p:cNvPr>
@@ -3923,108 +4002,29 @@
             <p:ph idx="1"/>
           </p:nvPr>
         </p:nvSpPr>
-        <p:spPr/>
+        <p:spPr>
+          <a:xfrm>
+            <a:off x="838200" y="2796406"/>
+            <a:ext cx="10515600" cy="1828786"/>
+          </a:xfrm>
+        </p:spPr>
         <p:txBody>
           <a:bodyPr>
-            <a:normAutofit/>
+            <a:noAutofit/>
           </a:bodyPr>
           <a:lstStyle/>
           <a:p>
-            <a:pPr>
-              <a:lnSpc>
-                <a:spcPct val="150000"/>
-              </a:lnSpc>
+            <a:pPr marL="0" indent="0" algn="ctr">
+              <a:buNone/>
             </a:pPr>
             <a:r>
-              <a:rPr lang="de-DE" sz="2400" dirty="0">
+              <a:rPr lang="de-DE" sz="3200" dirty="0">
                 <a:solidFill>
                   <a:schemeClr val="bg1"/>
                 </a:solidFill>
                 <a:latin typeface="Montserrat" panose="00000500000000000000" pitchFamily="2" charset="0"/>
               </a:rPr>
-              <a:t>soziales Netzwerk besteht aus Knoten (= Accounts)</a:t>
-            </a:r>
-          </a:p>
-          <a:p>
-            <a:pPr>
-              <a:lnSpc>
-                <a:spcPct val="150000"/>
-              </a:lnSpc>
-            </a:pPr>
-            <a:r>
-              <a:rPr lang="de-DE" sz="2400" dirty="0">
-                <a:solidFill>
-                  <a:schemeClr val="bg1"/>
-                </a:solidFill>
-                <a:latin typeface="Montserrat" panose="00000500000000000000" pitchFamily="2" charset="0"/>
-              </a:rPr>
-              <a:t>Zwei Typen von Accounts: User und InfluencerInnen</a:t>
-            </a:r>
-          </a:p>
-          <a:p>
-            <a:pPr>
-              <a:lnSpc>
-                <a:spcPct val="150000"/>
-              </a:lnSpc>
-            </a:pPr>
-            <a:r>
-              <a:rPr lang="de-DE" sz="2400" dirty="0">
-                <a:solidFill>
-                  <a:schemeClr val="bg1"/>
-                </a:solidFill>
-                <a:latin typeface="Montserrat" panose="00000500000000000000" pitchFamily="2" charset="0"/>
-              </a:rPr>
-              <a:t>User: Knoten mit wenigen Verbindungen zu anderen Knoten</a:t>
-            </a:r>
-          </a:p>
-          <a:p>
-            <a:pPr>
-              <a:lnSpc>
-                <a:spcPct val="150000"/>
-              </a:lnSpc>
-            </a:pPr>
-            <a:r>
-              <a:rPr lang="de-DE" sz="2400" dirty="0">
-                <a:solidFill>
-                  <a:schemeClr val="bg1"/>
-                </a:solidFill>
-                <a:latin typeface="Montserrat" panose="00000500000000000000" pitchFamily="2" charset="0"/>
-              </a:rPr>
-              <a:t>InfluencerInnen: Knoten mit vielen Verbindungen</a:t>
-            </a:r>
-          </a:p>
-          <a:p>
-            <a:pPr>
-              <a:lnSpc>
-                <a:spcPct val="150000"/>
-              </a:lnSpc>
-            </a:pPr>
-            <a:r>
-              <a:rPr lang="de-DE" sz="2400" dirty="0">
-                <a:solidFill>
-                  <a:schemeClr val="bg1"/>
-                </a:solidFill>
-                <a:latin typeface="Montserrat" panose="00000500000000000000" pitchFamily="2" charset="0"/>
-              </a:rPr>
-              <a:t>Deutlich mehr User als InfluencerInnen</a:t>
-            </a:r>
-          </a:p>
-          <a:p>
-            <a:pPr lvl="1">
-              <a:lnSpc>
-                <a:spcPct val="150000"/>
-              </a:lnSpc>
-              <a:buFont typeface="Courier New" panose="02070309020205020404" pitchFamily="49" charset="0"/>
-              <a:buChar char="o"/>
-            </a:pPr>
-            <a:r>
-              <a:rPr lang="de-DE" dirty="0">
-                <a:solidFill>
-                  <a:schemeClr val="bg1"/>
-                </a:solidFill>
-                <a:latin typeface="Montserrat" panose="00000500000000000000" pitchFamily="2" charset="0"/>
-              </a:rPr>
-              <a:t> vereinfachte Darstellung typischer Social-Media-Strukturen</a:t>
+              <a:t>Unter welchen Bedingungen kann Content-Moderation die Verbreitung von Desinformationen in sozialen Medien wirksam begrenzen? </a:t>
             </a:r>
           </a:p>
         </p:txBody>
@@ -4032,7 +4032,7 @@
     </p:spTree>
     <p:extLst>
       <p:ext uri="{BB962C8B-B14F-4D97-AF65-F5344CB8AC3E}">
-        <p14:creationId xmlns:p14="http://schemas.microsoft.com/office/powerpoint/2010/main" val="740013017"/>
+        <p14:creationId xmlns:p14="http://schemas.microsoft.com/office/powerpoint/2010/main" val="4168407949"/>
       </p:ext>
     </p:extLst>
   </p:cSld>
@@ -4385,13 +4385,13 @@
         </p:nvSpPr>
         <p:spPr>
           <a:xfrm>
-            <a:off x="985157" y="2884592"/>
-            <a:ext cx="10221685" cy="1088816"/>
+            <a:off x="985157" y="2428583"/>
+            <a:ext cx="10221685" cy="2000834"/>
           </a:xfrm>
         </p:spPr>
         <p:txBody>
           <a:bodyPr>
-            <a:normAutofit/>
+            <a:normAutofit fontScale="90000"/>
           </a:bodyPr>
           <a:lstStyle/>
           <a:p>
@@ -4402,7 +4402,7 @@
                 </a:solidFill>
                 <a:latin typeface="Montserrat" panose="00000500000000000000" pitchFamily="2" charset="0"/>
               </a:rPr>
-              <a:t>Demo</a:t>
+              <a:t>Aktueller Stand &amp; Demo</a:t>
             </a:r>
           </a:p>
         </p:txBody>

--- a/iug_praesentation.pptx
+++ b/iug_praesentation.pptx
@@ -4278,6 +4278,31 @@
               </a:lnSpc>
             </a:pPr>
             <a:r>
+              <a:rPr lang="de-DE" sz="2400" dirty="0" err="1">
+                <a:solidFill>
+                  <a:schemeClr val="bg1"/>
+                </a:solidFill>
+                <a:latin typeface="Montserrat" panose="00000500000000000000" pitchFamily="2" charset="0"/>
+              </a:rPr>
+              <a:t>NetworkX</a:t>
+            </a:r>
+            <a:r>
+              <a:rPr lang="de-DE" sz="2400" dirty="0">
+                <a:solidFill>
+                  <a:schemeClr val="bg1"/>
+                </a:solidFill>
+                <a:latin typeface="Montserrat" panose="00000500000000000000" pitchFamily="2" charset="0"/>
+              </a:rPr>
+              <a:t>: Erzeugung des Netzwerkes</a:t>
+            </a:r>
+          </a:p>
+          <a:p>
+            <a:pPr>
+              <a:lnSpc>
+                <a:spcPct val="150000"/>
+              </a:lnSpc>
+            </a:pPr>
+            <a:r>
               <a:rPr lang="de-DE" sz="2400" dirty="0">
                 <a:solidFill>
                   <a:schemeClr val="bg1"/>
@@ -4286,45 +4311,6 @@
               </a:rPr>
               <a:t>Pandas: Visualisierung der Simulationsergebnisse</a:t>
             </a:r>
-          </a:p>
-          <a:p>
-            <a:pPr>
-              <a:lnSpc>
-                <a:spcPct val="150000"/>
-              </a:lnSpc>
-            </a:pPr>
-            <a:r>
-              <a:rPr lang="de-DE" sz="2400" dirty="0" err="1">
-                <a:solidFill>
-                  <a:schemeClr val="bg1"/>
-                </a:solidFill>
-                <a:latin typeface="Montserrat" panose="00000500000000000000" pitchFamily="2" charset="0"/>
-              </a:rPr>
-              <a:t>NetworkX</a:t>
-            </a:r>
-            <a:r>
-              <a:rPr lang="de-DE" sz="2400" dirty="0">
-                <a:solidFill>
-                  <a:schemeClr val="bg1"/>
-                </a:solidFill>
-                <a:latin typeface="Montserrat" panose="00000500000000000000" pitchFamily="2" charset="0"/>
-              </a:rPr>
-              <a:t>: Erzeugung des Netzwerkes</a:t>
-            </a:r>
-          </a:p>
-          <a:p>
-            <a:pPr marL="0" indent="0">
-              <a:lnSpc>
-                <a:spcPct val="150000"/>
-              </a:lnSpc>
-              <a:buNone/>
-            </a:pPr>
-            <a:endParaRPr lang="de-DE" sz="2400" dirty="0">
-              <a:solidFill>
-                <a:schemeClr val="bg1"/>
-              </a:solidFill>
-              <a:latin typeface="Montserrat" panose="00000500000000000000" pitchFamily="2" charset="0"/>
-            </a:endParaRPr>
           </a:p>
         </p:txBody>
       </p:sp>
